--- a/src/ppt-super/assets/tpl-10-three-pillar/template.pptx
+++ b/src/ppt-super/assets/tpl-10-three-pillar/template.pptx
@@ -3136,7 +3136,14 @@
           <a:bodyPr rtlCol="0" anchor="ctr"/>
           <a:lstStyle/>
           <a:p>
-            <a:pPr algn="ctr"/>
+            <a:pPr algn="ctr">
+              <a:spcBef>
+                <a:spcPts val="0"/>
+              </a:spcBef>
+              <a:spcAft>
+                <a:spcPts val="0"/>
+              </a:spcAft>
+            </a:pPr>
           </a:p>
         </p:txBody>
       </p:sp>
@@ -3166,14 +3173,21 @@
               <a:lnSpc>
                 <a:spcPct val="112000"/>
               </a:lnSpc>
+              <a:spcBef>
+                <a:spcPts val="0"/>
+              </a:spcBef>
+              <a:spcAft>
+                <a:spcPts val="0"/>
+              </a:spcAft>
             </a:pPr>
             <a:r>
-              <a:rPr sz="1400" b="1" i="0">
+              <a:rPr sz="1400" b="1" i="0" lang="zh-CN" altLang="zh-CN">
                 <a:solidFill>
                   <a:srgbClr val="FFFFFF"/>
                 </a:solidFill>
                 <a:latin typeface="Microsoft YaHei"/>
                 <a:ea typeface="Microsoft YaHei"/>
+                <a:cs typeface="Microsoft YaHei"/>
               </a:rPr>
               <a:t>智算中心</a:t>
             </a:r>
@@ -3206,14 +3220,21 @@
               <a:lnSpc>
                 <a:spcPct val="112000"/>
               </a:lnSpc>
+              <a:spcBef>
+                <a:spcPts val="0"/>
+              </a:spcBef>
+              <a:spcAft>
+                <a:spcPts val="0"/>
+              </a:spcAft>
             </a:pPr>
             <a:r>
-              <a:rPr sz="2200" b="1" i="0">
+              <a:rPr sz="2200" b="1" i="0" lang="zh-CN" altLang="zh-CN">
                 <a:solidFill>
                   <a:srgbClr val="B90A0A"/>
                 </a:solidFill>
                 <a:latin typeface="Microsoft YaHei"/>
                 <a:ea typeface="Microsoft YaHei"/>
+                <a:cs typeface="Microsoft YaHei"/>
               </a:rPr>
               <a:t>E级智算中心三柱体系: 训练效率 ×2.3, 故障自愈率 91%</a:t>
             </a:r>
@@ -3298,7 +3319,14 @@
           <a:bodyPr rtlCol="0" anchor="ctr"/>
           <a:lstStyle/>
           <a:p>
-            <a:pPr algn="ctr"/>
+            <a:pPr algn="ctr">
+              <a:spcBef>
+                <a:spcPts val="0"/>
+              </a:spcBef>
+              <a:spcAft>
+                <a:spcPts val="0"/>
+              </a:spcAft>
+            </a:pPr>
           </a:p>
         </p:txBody>
       </p:sp>
@@ -3328,14 +3356,21 @@
               <a:lnSpc>
                 <a:spcPct val="112000"/>
               </a:lnSpc>
+              <a:spcBef>
+                <a:spcPts val="0"/>
+              </a:spcBef>
+              <a:spcAft>
+                <a:spcPts val="0"/>
+              </a:spcAft>
             </a:pPr>
             <a:r>
-              <a:rPr sz="1800" b="1" i="0">
+              <a:rPr sz="1800" b="1" i="0" lang="zh-CN" altLang="zh-CN">
                 <a:solidFill>
                   <a:srgbClr val="FFFFFF"/>
                 </a:solidFill>
                 <a:latin typeface="Microsoft YaHei"/>
                 <a:ea typeface="Microsoft YaHei"/>
+                <a:cs typeface="Microsoft YaHei"/>
               </a:rPr>
               <a:t>总目标: 建成 E 级智算中心, 支撑千亿参数大模型训练常态化运行</a:t>
             </a:r>
@@ -3492,7 +3527,14 @@
           <a:bodyPr rtlCol="0" anchor="ctr"/>
           <a:lstStyle/>
           <a:p>
-            <a:pPr algn="ctr"/>
+            <a:pPr algn="ctr">
+              <a:spcBef>
+                <a:spcPts val="0"/>
+              </a:spcBef>
+              <a:spcAft>
+                <a:spcPts val="0"/>
+              </a:spcAft>
+            </a:pPr>
           </a:p>
         </p:txBody>
       </p:sp>
@@ -3536,7 +3578,14 @@
           <a:bodyPr rtlCol="0" anchor="ctr"/>
           <a:lstStyle/>
           <a:p>
-            <a:pPr algn="ctr"/>
+            <a:pPr algn="ctr">
+              <a:spcBef>
+                <a:spcPts val="0"/>
+              </a:spcBef>
+              <a:spcAft>
+                <a:spcPts val="0"/>
+              </a:spcAft>
+            </a:pPr>
           </a:p>
         </p:txBody>
       </p:sp>
@@ -3580,7 +3629,14 @@
           <a:bodyPr rtlCol="0" anchor="ctr"/>
           <a:lstStyle/>
           <a:p>
-            <a:pPr algn="ctr"/>
+            <a:pPr algn="ctr">
+              <a:spcBef>
+                <a:spcPts val="0"/>
+              </a:spcBef>
+              <a:spcAft>
+                <a:spcPts val="0"/>
+              </a:spcAft>
+            </a:pPr>
           </a:p>
         </p:txBody>
       </p:sp>
@@ -3592,8 +3648,8 @@
         </p:nvSpPr>
         <p:spPr>
           <a:xfrm>
-            <a:off x="469899" y="1701800"/>
-            <a:ext cx="266700" cy="266700"/>
+            <a:off x="451611" y="1689481"/>
+            <a:ext cx="303276" cy="291338"/>
           </a:xfrm>
           <a:prstGeom prst="rect">
             <a:avLst/>
@@ -3610,14 +3666,21 @@
               <a:lnSpc>
                 <a:spcPct val="112000"/>
               </a:lnSpc>
+              <a:spcBef>
+                <a:spcPts val="0"/>
+              </a:spcBef>
+              <a:spcAft>
+                <a:spcPts val="0"/>
+              </a:spcAft>
             </a:pPr>
             <a:r>
-              <a:rPr sz="1700" b="1" i="0">
+              <a:rPr sz="1700" b="1" i="0" lang="zh-CN" altLang="zh-CN">
                 <a:solidFill>
                   <a:srgbClr val="FFFFFF"/>
                 </a:solidFill>
                 <a:latin typeface="Microsoft YaHei"/>
                 <a:ea typeface="Microsoft YaHei"/>
+                <a:cs typeface="Microsoft YaHei"/>
               </a:rPr>
               <a:t>①</a:t>
             </a:r>
@@ -3650,14 +3713,21 @@
               <a:lnSpc>
                 <a:spcPct val="112000"/>
               </a:lnSpc>
+              <a:spcBef>
+                <a:spcPts val="0"/>
+              </a:spcBef>
+              <a:spcAft>
+                <a:spcPts val="0"/>
+              </a:spcAft>
             </a:pPr>
             <a:r>
-              <a:rPr sz="1600" b="1" i="0">
+              <a:rPr sz="1600" b="1" i="0" lang="zh-CN" altLang="zh-CN">
                 <a:solidFill>
                   <a:srgbClr val="FFFFFF"/>
                 </a:solidFill>
                 <a:latin typeface="Microsoft YaHei"/>
                 <a:ea typeface="Microsoft YaHei"/>
+                <a:cs typeface="Microsoft YaHei"/>
               </a:rPr>
               <a:t>异构算力底座</a:t>
             </a:r>
@@ -3690,14 +3760,21 @@
               <a:lnSpc>
                 <a:spcPct val="130000"/>
               </a:lnSpc>
+              <a:spcBef>
+                <a:spcPts val="0"/>
+              </a:spcBef>
+              <a:spcAft>
+                <a:spcPts val="0"/>
+              </a:spcAft>
             </a:pPr>
             <a:r>
-              <a:rPr sz="1200" b="0" i="0">
+              <a:rPr sz="1200" b="0" i="0" lang="zh-CN" altLang="zh-CN">
                 <a:solidFill>
                   <a:srgbClr val="262626"/>
                 </a:solidFill>
                 <a:latin typeface="Microsoft YaHei"/>
                 <a:ea typeface="Microsoft YaHei"/>
+                <a:cs typeface="Microsoft YaHei"/>
               </a:rPr>
               <a:t>算力底座以 Atlas 900 A3 集群为核心, 单集群提供 4000P 稠密算力, 通过训推一体调度将算力利用率从 58% 提升至 86%, 昇腾与鲲鹏资源池化纳管率达 92%。机房采用全液冷方案, PUE 由 1.42 降至 1.12; 断点续训 10 分钟内恢复, 已支撑千卡集群连续稳定训练 30 天, 弹性扩缩容使峰值算力 10 分钟就位, 碎片算力利用率再提升 21%。</a:t>
             </a:r>
@@ -3744,7 +3821,14 @@
           <a:bodyPr rtlCol="0" anchor="ctr"/>
           <a:lstStyle/>
           <a:p>
-            <a:pPr algn="ctr"/>
+            <a:pPr algn="ctr">
+              <a:spcBef>
+                <a:spcPts val="0"/>
+              </a:spcBef>
+              <a:spcAft>
+                <a:spcPts val="0"/>
+              </a:spcAft>
+            </a:pPr>
           </a:p>
         </p:txBody>
       </p:sp>
@@ -3774,14 +3858,21 @@
               <a:lnSpc>
                 <a:spcPct val="112000"/>
               </a:lnSpc>
+              <a:spcBef>
+                <a:spcPts val="0"/>
+              </a:spcBef>
+              <a:spcAft>
+                <a:spcPts val="0"/>
+              </a:spcAft>
             </a:pPr>
             <a:r>
-              <a:rPr sz="1300" b="1" i="0">
+              <a:rPr sz="1300" b="1" i="0" lang="zh-CN" altLang="zh-CN">
                 <a:solidFill>
                   <a:srgbClr val="262626"/>
                 </a:solidFill>
                 <a:latin typeface="Microsoft YaHei"/>
                 <a:ea typeface="Microsoft YaHei"/>
+                <a:cs typeface="Microsoft YaHei"/>
               </a:rPr>
               <a:t>算力利用率 86%</a:t>
             </a:r>
@@ -3814,14 +3905,21 @@
               <a:lnSpc>
                 <a:spcPct val="112000"/>
               </a:lnSpc>
+              <a:spcBef>
+                <a:spcPts val="0"/>
+              </a:spcBef>
+              <a:spcAft>
+                <a:spcPts val="0"/>
+              </a:spcAft>
             </a:pPr>
             <a:r>
-              <a:rPr sz="950" b="0" i="0">
+              <a:rPr sz="950" b="0" i="0" lang="zh-CN" altLang="zh-CN">
                 <a:solidFill>
                   <a:srgbClr val="595959"/>
                 </a:solidFill>
                 <a:latin typeface="Microsoft YaHei"/>
                 <a:ea typeface="Microsoft YaHei"/>
+                <a:cs typeface="Microsoft YaHei"/>
               </a:rPr>
               <a:t>已支撑 3 个千亿参数模型全流程训练</a:t>
             </a:r>
@@ -3906,7 +4004,14 @@
           <a:bodyPr rtlCol="0" anchor="ctr"/>
           <a:lstStyle/>
           <a:p>
-            <a:pPr algn="ctr"/>
+            <a:pPr algn="ctr">
+              <a:spcBef>
+                <a:spcPts val="0"/>
+              </a:spcBef>
+              <a:spcAft>
+                <a:spcPts val="0"/>
+              </a:spcAft>
+            </a:pPr>
           </a:p>
         </p:txBody>
       </p:sp>
@@ -3952,7 +4057,14 @@
           <a:bodyPr rtlCol="0" anchor="ctr"/>
           <a:lstStyle/>
           <a:p>
-            <a:pPr algn="ctr"/>
+            <a:pPr algn="ctr">
+              <a:spcBef>
+                <a:spcPts val="0"/>
+              </a:spcBef>
+              <a:spcAft>
+                <a:spcPts val="0"/>
+              </a:spcAft>
+            </a:pPr>
           </a:p>
         </p:txBody>
       </p:sp>
@@ -4414,14 +4526,21 @@
               <a:lnSpc>
                 <a:spcPct val="112000"/>
               </a:lnSpc>
+              <a:spcBef>
+                <a:spcPts val="0"/>
+              </a:spcBef>
+              <a:spcAft>
+                <a:spcPts val="0"/>
+              </a:spcAft>
             </a:pPr>
             <a:r>
-              <a:rPr sz="900" b="0" i="0">
+              <a:rPr sz="900" b="0" i="0" lang="zh-CN" altLang="zh-CN">
                 <a:solidFill>
                   <a:srgbClr val="595959"/>
                 </a:solidFill>
                 <a:latin typeface="Microsoft YaHei"/>
                 <a:ea typeface="Microsoft YaHei"/>
+                <a:cs typeface="Microsoft YaHei"/>
               </a:rPr>
               <a:t>CHIP</a:t>
             </a:r>
@@ -4470,7 +4589,14 @@
           <a:bodyPr rtlCol="0" anchor="ctr"/>
           <a:lstStyle/>
           <a:p>
-            <a:pPr algn="ctr"/>
+            <a:pPr algn="ctr">
+              <a:spcBef>
+                <a:spcPts val="0"/>
+              </a:spcBef>
+              <a:spcAft>
+                <a:spcPts val="0"/>
+              </a:spcAft>
+            </a:pPr>
           </a:p>
         </p:txBody>
       </p:sp>
@@ -4514,7 +4640,14 @@
           <a:bodyPr rtlCol="0" anchor="ctr"/>
           <a:lstStyle/>
           <a:p>
-            <a:pPr algn="ctr"/>
+            <a:pPr algn="ctr">
+              <a:spcBef>
+                <a:spcPts val="0"/>
+              </a:spcBef>
+              <a:spcAft>
+                <a:spcPts val="0"/>
+              </a:spcAft>
+            </a:pPr>
           </a:p>
         </p:txBody>
       </p:sp>
@@ -4558,7 +4691,14 @@
           <a:bodyPr rtlCol="0" anchor="ctr"/>
           <a:lstStyle/>
           <a:p>
-            <a:pPr algn="ctr"/>
+            <a:pPr algn="ctr">
+              <a:spcBef>
+                <a:spcPts val="0"/>
+              </a:spcBef>
+              <a:spcAft>
+                <a:spcPts val="0"/>
+              </a:spcAft>
+            </a:pPr>
           </a:p>
         </p:txBody>
       </p:sp>
@@ -4570,8 +4710,8 @@
         </p:nvSpPr>
         <p:spPr>
           <a:xfrm>
-            <a:off x="4356100" y="1701800"/>
-            <a:ext cx="266700" cy="266700"/>
+            <a:off x="4337812" y="1689481"/>
+            <a:ext cx="303276" cy="291338"/>
           </a:xfrm>
           <a:prstGeom prst="rect">
             <a:avLst/>
@@ -4588,14 +4728,21 @@
               <a:lnSpc>
                 <a:spcPct val="112000"/>
               </a:lnSpc>
+              <a:spcBef>
+                <a:spcPts val="0"/>
+              </a:spcBef>
+              <a:spcAft>
+                <a:spcPts val="0"/>
+              </a:spcAft>
             </a:pPr>
             <a:r>
-              <a:rPr sz="1700" b="1" i="0">
+              <a:rPr sz="1700" b="1" i="0" lang="zh-CN" altLang="zh-CN">
                 <a:solidFill>
                   <a:srgbClr val="FFFFFF"/>
                 </a:solidFill>
                 <a:latin typeface="Microsoft YaHei"/>
                 <a:ea typeface="Microsoft YaHei"/>
+                <a:cs typeface="Microsoft YaHei"/>
               </a:rPr>
               <a:t>②</a:t>
             </a:r>
@@ -4628,14 +4775,21 @@
               <a:lnSpc>
                 <a:spcPct val="112000"/>
               </a:lnSpc>
+              <a:spcBef>
+                <a:spcPts val="0"/>
+              </a:spcBef>
+              <a:spcAft>
+                <a:spcPts val="0"/>
+              </a:spcAft>
             </a:pPr>
             <a:r>
-              <a:rPr sz="1600" b="1" i="0">
+              <a:rPr sz="1600" b="1" i="0" lang="zh-CN" altLang="zh-CN">
                 <a:solidFill>
                   <a:srgbClr val="FFFFFF"/>
                 </a:solidFill>
                 <a:latin typeface="Microsoft YaHei"/>
                 <a:ea typeface="Microsoft YaHei"/>
+                <a:cs typeface="Microsoft YaHei"/>
               </a:rPr>
               <a:t>高速参数互联</a:t>
             </a:r>
@@ -4668,14 +4822,21 @@
               <a:lnSpc>
                 <a:spcPct val="130000"/>
               </a:lnSpc>
+              <a:spcBef>
+                <a:spcPts val="0"/>
+              </a:spcBef>
+              <a:spcAft>
+                <a:spcPts val="0"/>
+              </a:spcAft>
             </a:pPr>
             <a:r>
-              <a:rPr sz="1200" b="0" i="0">
+              <a:rPr sz="1200" b="0" i="0" lang="zh-CN" altLang="zh-CN">
                 <a:solidFill>
                   <a:srgbClr val="262626"/>
                 </a:solidFill>
                 <a:latin typeface="Microsoft YaHei"/>
                 <a:ea typeface="Microsoft YaHei"/>
+                <a:cs typeface="Microsoft YaHei"/>
               </a:rPr>
               <a:t>参数面采用 RoCE 无损以太与 400GE 全互联组网, NSLB 网络级负载均衡使链路利用率稳定在 95% 以上, iLossless 拥塞控制将长尾时延压降 73%。万卡组网线性度保持 92% 以上, 通信开销占比控制在 18% 以内; 参数面、业务面与带外管理三网分离, 光模块故障预测使链路闪断率下降 90%, 拓扑感知通信编排让 AllReduce 集合通信提速 1.8 倍。</a:t>
             </a:r>
@@ -4722,7 +4883,14 @@
           <a:bodyPr rtlCol="0" anchor="ctr"/>
           <a:lstStyle/>
           <a:p>
-            <a:pPr algn="ctr"/>
+            <a:pPr algn="ctr">
+              <a:spcBef>
+                <a:spcPts val="0"/>
+              </a:spcBef>
+              <a:spcAft>
+                <a:spcPts val="0"/>
+              </a:spcAft>
+            </a:pPr>
           </a:p>
         </p:txBody>
       </p:sp>
@@ -4752,14 +4920,21 @@
               <a:lnSpc>
                 <a:spcPct val="112000"/>
               </a:lnSpc>
+              <a:spcBef>
+                <a:spcPts val="0"/>
+              </a:spcBef>
+              <a:spcAft>
+                <a:spcPts val="0"/>
+              </a:spcAft>
             </a:pPr>
             <a:r>
-              <a:rPr sz="1300" b="1" i="0">
+              <a:rPr sz="1300" b="1" i="0" lang="zh-CN" altLang="zh-CN">
                 <a:solidFill>
                   <a:srgbClr val="262626"/>
                 </a:solidFill>
                 <a:latin typeface="Microsoft YaHei"/>
                 <a:ea typeface="Microsoft YaHei"/>
+                <a:cs typeface="Microsoft YaHei"/>
               </a:rPr>
               <a:t>组网线性度 ≥92%</a:t>
             </a:r>
@@ -4792,14 +4967,21 @@
               <a:lnSpc>
                 <a:spcPct val="112000"/>
               </a:lnSpc>
+              <a:spcBef>
+                <a:spcPts val="0"/>
+              </a:spcBef>
+              <a:spcAft>
+                <a:spcPts val="0"/>
+              </a:spcAft>
             </a:pPr>
             <a:r>
-              <a:rPr sz="950" b="0" i="0">
+              <a:rPr sz="950" b="0" i="0" lang="zh-CN" altLang="zh-CN">
                 <a:solidFill>
                   <a:srgbClr val="595959"/>
                 </a:solidFill>
                 <a:latin typeface="Microsoft YaHei"/>
                 <a:ea typeface="Microsoft YaHei"/>
+                <a:cs typeface="Microsoft YaHei"/>
               </a:rPr>
               <a:t>与算力/存储联合调优, 端到端无瓶颈</a:t>
             </a:r>
@@ -4882,7 +5064,14 @@
           <a:bodyPr rtlCol="0" anchor="ctr"/>
           <a:lstStyle/>
           <a:p>
-            <a:pPr algn="ctr"/>
+            <a:pPr algn="ctr">
+              <a:spcBef>
+                <a:spcPts val="0"/>
+              </a:spcBef>
+              <a:spcAft>
+                <a:spcPts val="0"/>
+              </a:spcAft>
+            </a:pPr>
           </a:p>
         </p:txBody>
       </p:sp>
@@ -4926,7 +5115,14 @@
           <a:bodyPr rtlCol="0" anchor="ctr"/>
           <a:lstStyle/>
           <a:p>
-            <a:pPr algn="ctr"/>
+            <a:pPr algn="ctr">
+              <a:spcBef>
+                <a:spcPts val="0"/>
+              </a:spcBef>
+              <a:spcAft>
+                <a:spcPts val="0"/>
+              </a:spcAft>
+            </a:pPr>
           </a:p>
         </p:txBody>
       </p:sp>
@@ -4970,7 +5166,14 @@
           <a:bodyPr rtlCol="0" anchor="ctr"/>
           <a:lstStyle/>
           <a:p>
-            <a:pPr algn="ctr"/>
+            <a:pPr algn="ctr">
+              <a:spcBef>
+                <a:spcPts val="0"/>
+              </a:spcBef>
+              <a:spcAft>
+                <a:spcPts val="0"/>
+              </a:spcAft>
+            </a:pPr>
           </a:p>
         </p:txBody>
       </p:sp>
@@ -5108,14 +5311,21 @@
               <a:lnSpc>
                 <a:spcPct val="112000"/>
               </a:lnSpc>
+              <a:spcBef>
+                <a:spcPts val="0"/>
+              </a:spcBef>
+              <a:spcAft>
+                <a:spcPts val="0"/>
+              </a:spcAft>
             </a:pPr>
             <a:r>
-              <a:rPr sz="900" b="0" i="0">
+              <a:rPr sz="900" b="0" i="0" lang="zh-CN" altLang="zh-CN">
                 <a:solidFill>
                   <a:srgbClr val="595959"/>
                 </a:solidFill>
                 <a:latin typeface="Microsoft YaHei"/>
                 <a:ea typeface="Microsoft YaHei"/>
+                <a:cs typeface="Microsoft YaHei"/>
               </a:rPr>
               <a:t>NET</a:t>
             </a:r>
@@ -5164,7 +5374,14 @@
           <a:bodyPr rtlCol="0" anchor="ctr"/>
           <a:lstStyle/>
           <a:p>
-            <a:pPr algn="ctr"/>
+            <a:pPr algn="ctr">
+              <a:spcBef>
+                <a:spcPts val="0"/>
+              </a:spcBef>
+              <a:spcAft>
+                <a:spcPts val="0"/>
+              </a:spcAft>
+            </a:pPr>
           </a:p>
         </p:txBody>
       </p:sp>
@@ -5208,7 +5425,14 @@
           <a:bodyPr rtlCol="0" anchor="ctr"/>
           <a:lstStyle/>
           <a:p>
-            <a:pPr algn="ctr"/>
+            <a:pPr algn="ctr">
+              <a:spcBef>
+                <a:spcPts val="0"/>
+              </a:spcBef>
+              <a:spcAft>
+                <a:spcPts val="0"/>
+              </a:spcAft>
+            </a:pPr>
           </a:p>
         </p:txBody>
       </p:sp>
@@ -5252,7 +5476,14 @@
           <a:bodyPr rtlCol="0" anchor="ctr"/>
           <a:lstStyle/>
           <a:p>
-            <a:pPr algn="ctr"/>
+            <a:pPr algn="ctr">
+              <a:spcBef>
+                <a:spcPts val="0"/>
+              </a:spcBef>
+              <a:spcAft>
+                <a:spcPts val="0"/>
+              </a:spcAft>
+            </a:pPr>
           </a:p>
         </p:txBody>
       </p:sp>
@@ -5264,8 +5495,8 @@
         </p:nvSpPr>
         <p:spPr>
           <a:xfrm>
-            <a:off x="8242300" y="1701800"/>
-            <a:ext cx="266700" cy="266700"/>
+            <a:off x="8224011" y="1689481"/>
+            <a:ext cx="303276" cy="291338"/>
           </a:xfrm>
           <a:prstGeom prst="rect">
             <a:avLst/>
@@ -5282,14 +5513,21 @@
               <a:lnSpc>
                 <a:spcPct val="112000"/>
               </a:lnSpc>
+              <a:spcBef>
+                <a:spcPts val="0"/>
+              </a:spcBef>
+              <a:spcAft>
+                <a:spcPts val="0"/>
+              </a:spcAft>
             </a:pPr>
             <a:r>
-              <a:rPr sz="1700" b="1" i="0">
+              <a:rPr sz="1700" b="1" i="0" lang="zh-CN" altLang="zh-CN">
                 <a:solidFill>
                   <a:srgbClr val="FFFFFF"/>
                 </a:solidFill>
                 <a:latin typeface="Microsoft YaHei"/>
                 <a:ea typeface="Microsoft YaHei"/>
+                <a:cs typeface="Microsoft YaHei"/>
               </a:rPr>
               <a:t>③</a:t>
             </a:r>
@@ -5322,14 +5560,21 @@
               <a:lnSpc>
                 <a:spcPct val="112000"/>
               </a:lnSpc>
+              <a:spcBef>
+                <a:spcPts val="0"/>
+              </a:spcBef>
+              <a:spcAft>
+                <a:spcPts val="0"/>
+              </a:spcAft>
             </a:pPr>
             <a:r>
-              <a:rPr sz="1600" b="1" i="0">
+              <a:rPr sz="1600" b="1" i="0" lang="zh-CN" altLang="zh-CN">
                 <a:solidFill>
                   <a:srgbClr val="FFFFFF"/>
                 </a:solidFill>
                 <a:latin typeface="Microsoft YaHei"/>
                 <a:ea typeface="Microsoft YaHei"/>
+                <a:cs typeface="Microsoft YaHei"/>
               </a:rPr>
               <a:t>安全可信运营</a:t>
             </a:r>
@@ -5362,14 +5607,21 @@
               <a:lnSpc>
                 <a:spcPct val="130000"/>
               </a:lnSpc>
+              <a:spcBef>
+                <a:spcPts val="0"/>
+              </a:spcBef>
+              <a:spcAft>
+                <a:spcPts val="0"/>
+              </a:spcAft>
             </a:pPr>
             <a:r>
-              <a:rPr sz="1200" b="0" i="0">
+              <a:rPr sz="1200" b="0" i="0" lang="zh-CN" altLang="zh-CN">
                 <a:solidFill>
                   <a:srgbClr val="262626"/>
                 </a:solidFill>
                 <a:latin typeface="Microsoft YaHei"/>
                 <a:ea typeface="Microsoft YaHei"/>
+                <a:cs typeface="Microsoft YaHei"/>
               </a:rPr>
               <a:t>运营体系实现训练数据全链路加密与密态计算 100% 覆盖, 模型资产嵌入水印并对权重外发实施防泄漏审计, 同时满足等保 2.0 四级与 AI 安全围栏双合规要求。故障自愈编排将 MTTR 由 4 小时压缩至 22 分钟, 算力租户硬隔离保持越权访问零事件; 全栈可观测覆盖 5000 余项秒级采集指标, 红蓝对抗常态化演练确保高危漏洞 24 小时内闭环。</a:t>
             </a:r>
@@ -5416,7 +5668,14 @@
           <a:bodyPr rtlCol="0" anchor="ctr"/>
           <a:lstStyle/>
           <a:p>
-            <a:pPr algn="ctr"/>
+            <a:pPr algn="ctr">
+              <a:spcBef>
+                <a:spcPts val="0"/>
+              </a:spcBef>
+              <a:spcAft>
+                <a:spcPts val="0"/>
+              </a:spcAft>
+            </a:pPr>
           </a:p>
         </p:txBody>
       </p:sp>
@@ -5446,14 +5705,21 @@
               <a:lnSpc>
                 <a:spcPct val="112000"/>
               </a:lnSpc>
+              <a:spcBef>
+                <a:spcPts val="0"/>
+              </a:spcBef>
+              <a:spcAft>
+                <a:spcPts val="0"/>
+              </a:spcAft>
             </a:pPr>
             <a:r>
-              <a:rPr sz="1300" b="1" i="0">
+              <a:rPr sz="1300" b="1" i="0" lang="zh-CN" altLang="zh-CN">
                 <a:solidFill>
                   <a:srgbClr val="262626"/>
                 </a:solidFill>
                 <a:latin typeface="Microsoft YaHei"/>
                 <a:ea typeface="Microsoft YaHei"/>
+                <a:cs typeface="Microsoft YaHei"/>
               </a:rPr>
               <a:t>MTTR 压缩 91%</a:t>
             </a:r>
@@ -5486,14 +5752,21 @@
               <a:lnSpc>
                 <a:spcPct val="112000"/>
               </a:lnSpc>
+              <a:spcBef>
+                <a:spcPts val="0"/>
+              </a:spcBef>
+              <a:spcAft>
+                <a:spcPts val="0"/>
+              </a:spcAft>
             </a:pPr>
             <a:r>
-              <a:rPr sz="950" b="0" i="0">
+              <a:rPr sz="950" b="0" i="0" lang="zh-CN" altLang="zh-CN">
                 <a:solidFill>
                   <a:srgbClr val="595959"/>
                 </a:solidFill>
                 <a:latin typeface="Microsoft YaHei"/>
                 <a:ea typeface="Microsoft YaHei"/>
+                <a:cs typeface="Microsoft YaHei"/>
               </a:rPr>
               <a:t>通过安全运营中心年度审计认证</a:t>
             </a:r>
@@ -5578,7 +5851,14 @@
           <a:bodyPr rtlCol="0" anchor="ctr"/>
           <a:lstStyle/>
           <a:p>
-            <a:pPr algn="ctr"/>
+            <a:pPr algn="ctr">
+              <a:spcBef>
+                <a:spcPts val="0"/>
+              </a:spcBef>
+              <a:spcAft>
+                <a:spcPts val="0"/>
+              </a:spcAft>
+            </a:pPr>
           </a:p>
         </p:txBody>
       </p:sp>
@@ -5608,14 +5888,21 @@
               <a:lnSpc>
                 <a:spcPct val="112000"/>
               </a:lnSpc>
+              <a:spcBef>
+                <a:spcPts val="0"/>
+              </a:spcBef>
+              <a:spcAft>
+                <a:spcPts val="0"/>
+              </a:spcAft>
             </a:pPr>
             <a:r>
-              <a:rPr sz="2100" b="1" i="0">
+              <a:rPr sz="2100" b="1" i="0" lang="zh-CN" altLang="zh-CN">
                 <a:solidFill>
                   <a:srgbClr val="2E75B6"/>
                 </a:solidFill>
                 <a:latin typeface="Microsoft YaHei"/>
                 <a:ea typeface="Microsoft YaHei"/>
+                <a:cs typeface="Microsoft YaHei"/>
               </a:rPr>
               <a:t>✓</a:t>
             </a:r>
@@ -5648,14 +5935,21 @@
               <a:lnSpc>
                 <a:spcPct val="112000"/>
               </a:lnSpc>
+              <a:spcBef>
+                <a:spcPts val="0"/>
+              </a:spcBef>
+              <a:spcAft>
+                <a:spcPts val="0"/>
+              </a:spcAft>
             </a:pPr>
             <a:r>
-              <a:rPr sz="900" b="0" i="0">
+              <a:rPr sz="900" b="0" i="0" lang="zh-CN" altLang="zh-CN">
                 <a:solidFill>
                   <a:srgbClr val="595959"/>
                 </a:solidFill>
                 <a:latin typeface="Microsoft YaHei"/>
                 <a:ea typeface="Microsoft YaHei"/>
+                <a:cs typeface="Microsoft YaHei"/>
               </a:rPr>
               <a:t>SHIELD</a:t>
             </a:r>
@@ -5702,7 +5996,14 @@
           <a:bodyPr rtlCol="0" anchor="ctr"/>
           <a:lstStyle/>
           <a:p>
-            <a:pPr algn="ctr"/>
+            <a:pPr algn="ctr">
+              <a:spcBef>
+                <a:spcPts val="0"/>
+              </a:spcBef>
+              <a:spcAft>
+                <a:spcPts val="0"/>
+              </a:spcAft>
+            </a:pPr>
           </a:p>
         </p:txBody>
       </p:sp>
@@ -5746,7 +6047,14 @@
           <a:bodyPr rtlCol="0" anchor="ctr"/>
           <a:lstStyle/>
           <a:p>
-            <a:pPr algn="ctr"/>
+            <a:pPr algn="ctr">
+              <a:spcBef>
+                <a:spcPts val="0"/>
+              </a:spcBef>
+              <a:spcAft>
+                <a:spcPts val="0"/>
+              </a:spcAft>
+            </a:pPr>
           </a:p>
         </p:txBody>
       </p:sp>
@@ -5792,7 +6100,14 @@
           <a:bodyPr rtlCol="0" anchor="ctr"/>
           <a:lstStyle/>
           <a:p>
-            <a:pPr algn="ctr"/>
+            <a:pPr algn="ctr">
+              <a:spcBef>
+                <a:spcPts val="0"/>
+              </a:spcBef>
+              <a:spcAft>
+                <a:spcPts val="0"/>
+              </a:spcAft>
+            </a:pPr>
           </a:p>
         </p:txBody>
       </p:sp>
@@ -5838,7 +6153,14 @@
           <a:bodyPr rtlCol="0" anchor="ctr"/>
           <a:lstStyle/>
           <a:p>
-            <a:pPr algn="ctr"/>
+            <a:pPr algn="ctr">
+              <a:spcBef>
+                <a:spcPts val="0"/>
+              </a:spcBef>
+              <a:spcAft>
+                <a:spcPts val="0"/>
+              </a:spcAft>
+            </a:pPr>
           </a:p>
         </p:txBody>
       </p:sp>
@@ -5884,7 +6206,14 @@
           <a:bodyPr rtlCol="0" anchor="ctr"/>
           <a:lstStyle/>
           <a:p>
-            <a:pPr algn="ctr"/>
+            <a:pPr algn="ctr">
+              <a:spcBef>
+                <a:spcPts val="0"/>
+              </a:spcBef>
+              <a:spcAft>
+                <a:spcPts val="0"/>
+              </a:spcAft>
+            </a:pPr>
           </a:p>
         </p:txBody>
       </p:sp>
@@ -5914,14 +6243,21 @@
               <a:lnSpc>
                 <a:spcPct val="112000"/>
               </a:lnSpc>
+              <a:spcBef>
+                <a:spcPts val="0"/>
+              </a:spcBef>
+              <a:spcAft>
+                <a:spcPts val="0"/>
+              </a:spcAft>
             </a:pPr>
             <a:r>
-              <a:rPr sz="1500" b="1" i="0">
+              <a:rPr sz="1500" b="1" i="0" lang="zh-CN" altLang="zh-CN">
                 <a:solidFill>
                   <a:srgbClr val="262626"/>
                 </a:solidFill>
                 <a:latin typeface="Microsoft YaHei"/>
                 <a:ea typeface="Microsoft YaHei"/>
+                <a:cs typeface="Microsoft YaHei"/>
               </a:rPr>
               <a:t>统一数据底座: 湖仓一体 + 全链路血缘治理, 数据合规审计覆盖率 100%</a:t>
             </a:r>
